--- a/chap2/프레젠테이션1.pptx
+++ b/chap2/프레젠테이션1.pptx
@@ -254,7 +254,7 @@
           <a:p>
             <a:fld id="{29C3A43F-F939-4AE5-B0FB-15C22408FFEF}" type="datetimeFigureOut">
               <a:rPr lang="ko-KR" altLang="en-US" smtClean="0"/>
-              <a:t>2023-02-13</a:t>
+              <a:t>2023-02-14</a:t>
             </a:fld>
             <a:endParaRPr lang="ko-KR" altLang="en-US"/>
           </a:p>
@@ -424,7 +424,7 @@
           <a:p>
             <a:fld id="{29C3A43F-F939-4AE5-B0FB-15C22408FFEF}" type="datetimeFigureOut">
               <a:rPr lang="ko-KR" altLang="en-US" smtClean="0"/>
-              <a:t>2023-02-13</a:t>
+              <a:t>2023-02-14</a:t>
             </a:fld>
             <a:endParaRPr lang="ko-KR" altLang="en-US"/>
           </a:p>
@@ -604,7 +604,7 @@
           <a:p>
             <a:fld id="{29C3A43F-F939-4AE5-B0FB-15C22408FFEF}" type="datetimeFigureOut">
               <a:rPr lang="ko-KR" altLang="en-US" smtClean="0"/>
-              <a:t>2023-02-13</a:t>
+              <a:t>2023-02-14</a:t>
             </a:fld>
             <a:endParaRPr lang="ko-KR" altLang="en-US"/>
           </a:p>
@@ -774,7 +774,7 @@
           <a:p>
             <a:fld id="{29C3A43F-F939-4AE5-B0FB-15C22408FFEF}" type="datetimeFigureOut">
               <a:rPr lang="ko-KR" altLang="en-US" smtClean="0"/>
-              <a:t>2023-02-13</a:t>
+              <a:t>2023-02-14</a:t>
             </a:fld>
             <a:endParaRPr lang="ko-KR" altLang="en-US"/>
           </a:p>
@@ -1020,7 +1020,7 @@
           <a:p>
             <a:fld id="{29C3A43F-F939-4AE5-B0FB-15C22408FFEF}" type="datetimeFigureOut">
               <a:rPr lang="ko-KR" altLang="en-US" smtClean="0"/>
-              <a:t>2023-02-13</a:t>
+              <a:t>2023-02-14</a:t>
             </a:fld>
             <a:endParaRPr lang="ko-KR" altLang="en-US"/>
           </a:p>
@@ -1252,7 +1252,7 @@
           <a:p>
             <a:fld id="{29C3A43F-F939-4AE5-B0FB-15C22408FFEF}" type="datetimeFigureOut">
               <a:rPr lang="ko-KR" altLang="en-US" smtClean="0"/>
-              <a:t>2023-02-13</a:t>
+              <a:t>2023-02-14</a:t>
             </a:fld>
             <a:endParaRPr lang="ko-KR" altLang="en-US"/>
           </a:p>
@@ -1619,7 +1619,7 @@
           <a:p>
             <a:fld id="{29C3A43F-F939-4AE5-B0FB-15C22408FFEF}" type="datetimeFigureOut">
               <a:rPr lang="ko-KR" altLang="en-US" smtClean="0"/>
-              <a:t>2023-02-13</a:t>
+              <a:t>2023-02-14</a:t>
             </a:fld>
             <a:endParaRPr lang="ko-KR" altLang="en-US"/>
           </a:p>
@@ -1737,7 +1737,7 @@
           <a:p>
             <a:fld id="{29C3A43F-F939-4AE5-B0FB-15C22408FFEF}" type="datetimeFigureOut">
               <a:rPr lang="ko-KR" altLang="en-US" smtClean="0"/>
-              <a:t>2023-02-13</a:t>
+              <a:t>2023-02-14</a:t>
             </a:fld>
             <a:endParaRPr lang="ko-KR" altLang="en-US"/>
           </a:p>
@@ -1832,7 +1832,7 @@
           <a:p>
             <a:fld id="{29C3A43F-F939-4AE5-B0FB-15C22408FFEF}" type="datetimeFigureOut">
               <a:rPr lang="ko-KR" altLang="en-US" smtClean="0"/>
-              <a:t>2023-02-13</a:t>
+              <a:t>2023-02-14</a:t>
             </a:fld>
             <a:endParaRPr lang="ko-KR" altLang="en-US"/>
           </a:p>
@@ -2109,7 +2109,7 @@
           <a:p>
             <a:fld id="{29C3A43F-F939-4AE5-B0FB-15C22408FFEF}" type="datetimeFigureOut">
               <a:rPr lang="ko-KR" altLang="en-US" smtClean="0"/>
-              <a:t>2023-02-13</a:t>
+              <a:t>2023-02-14</a:t>
             </a:fld>
             <a:endParaRPr lang="ko-KR" altLang="en-US"/>
           </a:p>
@@ -2362,7 +2362,7 @@
           <a:p>
             <a:fld id="{29C3A43F-F939-4AE5-B0FB-15C22408FFEF}" type="datetimeFigureOut">
               <a:rPr lang="ko-KR" altLang="en-US" smtClean="0"/>
-              <a:t>2023-02-13</a:t>
+              <a:t>2023-02-14</a:t>
             </a:fld>
             <a:endParaRPr lang="ko-KR" altLang="en-US"/>
           </a:p>
@@ -2575,7 +2575,7 @@
           <a:p>
             <a:fld id="{29C3A43F-F939-4AE5-B0FB-15C22408FFEF}" type="datetimeFigureOut">
               <a:rPr lang="ko-KR" altLang="en-US" smtClean="0"/>
-              <a:t>2023-02-13</a:t>
+              <a:t>2023-02-14</a:t>
             </a:fld>
             <a:endParaRPr lang="ko-KR" altLang="en-US"/>
           </a:p>
@@ -3483,7 +3483,7 @@
             <a:pPr algn="ctr"/>
             <a:r>
               <a:rPr lang="en-US" altLang="ko-KR" dirty="0" smtClean="0"/>
-              <a:t>2023.2.3</a:t>
+              <a:t>2023.2.4</a:t>
             </a:r>
             <a:endParaRPr lang="ko-KR" altLang="en-US" dirty="0"/>
           </a:p>
@@ -3662,7 +3662,7 @@
             <a:pPr algn="ctr"/>
             <a:r>
               <a:rPr lang="en-US" altLang="ko-KR" dirty="0" smtClean="0"/>
-              <a:t>2023.2.3</a:t>
+              <a:t>2023.2.5</a:t>
             </a:r>
             <a:endParaRPr lang="ko-KR" altLang="en-US" dirty="0"/>
           </a:p>
